--- a/dist/초1/수학/수와연산/초1_수학_수와연산_06_50까지의수.pptx
+++ b/dist/초1/수학/수와연산/초1_수학_수와연산_06_50까지의수.pptx
@@ -121,13 +121,13 @@
   <p:extLst>
     <p:ext uri="{521415D9-36F7-43E2-AB2F-B90AF26B5E84}">
       <p14:sectionLst xmlns:p14="http://schemas.microsoft.com/office/powerpoint/2010/main">
-        <p14:section name="도입" id="{db7005ff-bcb7-7b14-f36f-03d5d449b75c}">
+        <p14:section name="도입" id="{8b76500e-133b-b0ff-a9a7-33cdd046dc83}">
           <p14:sldIdLst>
             <p14:sldId id="256"/>
             <p14:sldId id="257"/>
           </p14:sldIdLst>
         </p14:section>
-        <p14:section name="개념" id="{1d41bf7e-2564-be0a-a6f3-4129a61dc039}">
+        <p14:section name="개념" id="{f2109447-4294-3dbf-6d00-bea2489765f0}">
           <p14:sldIdLst>
             <p14:sldId id="258"/>
             <p14:sldId id="259"/>
@@ -136,26 +136,26 @@
             <p14:sldId id="262"/>
           </p14:sldIdLst>
         </p14:section>
-        <p14:section name="연습" id="{df2e4151-8624-481c-2a0f-c44f8ba93f67}">
+        <p14:section name="연습" id="{b6ae6bcb-1b44-0594-bf24-566e7078ec50}">
           <p14:sldIdLst>
             <p14:sldId id="263"/>
             <p14:sldId id="264"/>
             <p14:sldId id="265"/>
           </p14:sldIdLst>
         </p14:section>
-        <p14:section name="확인" id="{18ba31d0-25cf-103a-bbb8-776dfdc2c169}">
+        <p14:section name="확인" id="{c9795f98-6076-3829-f08c-c6cbc79db283}">
           <p14:sldIdLst>
             <p14:sldId id="266"/>
             <p14:sldId id="267"/>
             <p14:sldId id="268"/>
           </p14:sldIdLst>
         </p14:section>
-        <p14:section name="정리" id="{4c57b1cf-099b-24d6-43fe-5e8546a0c344}">
+        <p14:section name="정리" id="{80e20c6a-33f6-6c11-bb0b-75bbd56e8e59}">
           <p14:sldIdLst>
             <p14:sldId id="269"/>
           </p14:sldIdLst>
         </p14:section>
-        <p14:section name="보충" id="{abeafd41-41ed-fbbb-6269-577685e15edb}">
+        <p14:section name="보충" id="{db1bb1d7-c9b7-5f8f-8859-59e1ea07defa}">
           <p14:sldIdLst>
             <p14:sldId id="270"/>
           </p14:sldIdLst>
@@ -3055,7 +3055,7 @@
           <a:bodyPr wrap="square" lIns="0" tIns="0" rIns="0" bIns="0" rtlCol="0" anchor="ctr"/>
           <a:lstStyle/>
           <a:p>
-            <a:pPr algn="l" indent="0" marL="0">
+            <a:pPr eaLnBrk="0" algn="l" indent="0" marL="0">
               <a:buNone/>
             </a:pPr>
             <a:r>
@@ -3096,7 +3096,7 @@
           <a:bodyPr wrap="square" lIns="0" tIns="0" rIns="0" bIns="0" rtlCol="0" anchor="t"/>
           <a:lstStyle/>
           <a:p>
-            <a:pPr indent="0" marL="0">
+            <a:pPr eaLnBrk="0" indent="0" marL="0">
               <a:buNone/>
             </a:pPr>
             <a:r>
@@ -3730,7 +3730,7 @@
           <a:bodyPr wrap="square" lIns="0" tIns="0" rIns="0" bIns="0" rtlCol="0" anchor="ctr"/>
           <a:lstStyle/>
           <a:p>
-            <a:pPr indent="0" marL="0">
+            <a:pPr eaLnBrk="0" indent="0" marL="0">
               <a:spcAft>
                 <a:spcPts val="600"/>
               </a:spcAft>
@@ -3750,7 +3750,7 @@
             <a:endParaRPr lang="ko-KR" sz="3200" dirty="0"/>
           </a:p>
           <a:p>
-            <a:pPr indent="0" marL="0">
+            <a:pPr eaLnBrk="0" indent="0" marL="0">
               <a:spcAft>
                 <a:spcPts val="600"/>
               </a:spcAft>
@@ -3770,7 +3770,7 @@
             <a:endParaRPr lang="ko-KR" sz="3200" dirty="0"/>
           </a:p>
           <a:p>
-            <a:pPr indent="0" marL="0">
+            <a:pPr eaLnBrk="0" indent="0" marL="0">
               <a:spcAft>
                 <a:spcPts val="600"/>
               </a:spcAft>
@@ -3839,7 +3839,7 @@
           <a:bodyPr wrap="square" lIns="0" tIns="0" rIns="0" bIns="0" rtlCol="0" anchor="ctr"/>
           <a:lstStyle/>
           <a:p>
-            <a:pPr algn="l" indent="0" marL="0">
+            <a:pPr eaLnBrk="0" algn="l" indent="0" marL="0">
               <a:buNone/>
             </a:pPr>
             <a:r>
@@ -3905,7 +3905,7 @@
           <a:bodyPr wrap="square" lIns="0" tIns="0" rIns="0" bIns="0" rtlCol="0" anchor="ctr"/>
           <a:lstStyle/>
           <a:p>
-            <a:pPr indent="0" marL="0">
+            <a:pPr eaLnBrk="0" indent="0" marL="0">
               <a:spcAft>
                 <a:spcPts val="600"/>
               </a:spcAft>
@@ -3974,7 +3974,7 @@
           <a:bodyPr wrap="square" lIns="0" tIns="0" rIns="0" bIns="0" rtlCol="0" anchor="ctr"/>
           <a:lstStyle/>
           <a:p>
-            <a:pPr indent="0" marL="0">
+            <a:pPr eaLnBrk="0" indent="0" marL="0">
               <a:spcAft>
                 <a:spcPts val="600"/>
               </a:spcAft>
@@ -4024,7 +4024,7 @@
           <a:bodyPr wrap="square" lIns="177800" tIns="0" rIns="177800" bIns="0" rtlCol="0" anchor="ctr"/>
           <a:lstStyle/>
           <a:p>
-            <a:pPr algn="l" indent="0" marL="0">
+            <a:pPr eaLnBrk="0" algn="l" indent="0" marL="0">
               <a:buNone/>
             </a:pPr>
             <a:r>
@@ -4063,7 +4063,7 @@
           <a:bodyPr wrap="square" lIns="0" tIns="0" rIns="0" bIns="0" rtlCol="0" anchor="ctr"/>
           <a:lstStyle/>
           <a:p>
-            <a:pPr algn="ctr" indent="0" marL="0">
+            <a:pPr eaLnBrk="0" algn="ctr" indent="0" marL="0">
               <a:buNone/>
             </a:pPr>
             <a:r>
@@ -4110,7 +4110,7 @@
           <a:bodyPr wrap="square" lIns="177800" tIns="0" rIns="177800" bIns="0" rtlCol="0" anchor="ctr"/>
           <a:lstStyle/>
           <a:p>
-            <a:pPr algn="l" indent="0" marL="0">
+            <a:pPr eaLnBrk="0" algn="l" indent="0" marL="0">
               <a:buNone/>
             </a:pPr>
             <a:r>
@@ -4149,7 +4149,7 @@
           <a:bodyPr wrap="square" lIns="0" tIns="0" rIns="0" bIns="0" rtlCol="0" anchor="ctr"/>
           <a:lstStyle/>
           <a:p>
-            <a:pPr algn="ctr" indent="0" marL="0">
+            <a:pPr eaLnBrk="0" algn="ctr" indent="0" marL="0">
               <a:buNone/>
             </a:pPr>
             <a:r>
@@ -4206,7 +4206,7 @@
             </a:lvl1pPr>
           </a:lstStyle>
           <a:p>
-            <a:pPr algn="r"/>
+            <a:pPr eaLnBrk="0" algn="r"/>
             <a:fld id="{F7021451-1387-4CA6-816F-3879F97B5CBC}" type="slidenum">
               <a:rPr b="0" lang="en-US"/>
               <a:t>10</a:t>
@@ -4263,7 +4263,7 @@
           <a:bodyPr wrap="square" lIns="0" tIns="0" rIns="0" bIns="0" rtlCol="0" anchor="ctr"/>
           <a:lstStyle/>
           <a:p>
-            <a:pPr algn="l" indent="0" marL="0">
+            <a:pPr eaLnBrk="0" algn="l" indent="0" marL="0">
               <a:buNone/>
             </a:pPr>
             <a:r>
@@ -4302,7 +4302,7 @@
           <a:bodyPr wrap="square" lIns="0" tIns="0" rIns="0" bIns="0" rtlCol="0" anchor="ctr"/>
           <a:lstStyle/>
           <a:p>
-            <a:pPr algn="l" indent="0" marL="0">
+            <a:pPr eaLnBrk="0" algn="l" indent="0" marL="0">
               <a:buNone/>
             </a:pPr>
             <a:r>
@@ -4349,7 +4349,7 @@
           <a:bodyPr wrap="square" lIns="0" tIns="0" rIns="0" bIns="0" rtlCol="0" anchor="ctr"/>
           <a:lstStyle/>
           <a:p>
-            <a:pPr algn="ctr" indent="0" marL="0">
+            <a:pPr eaLnBrk="0" algn="ctr" indent="0" marL="0">
               <a:buNone/>
             </a:pPr>
             <a:r>
@@ -4388,7 +4388,7 @@
           <a:bodyPr wrap="square" lIns="0" tIns="0" rIns="0" bIns="0" rtlCol="0" anchor="ctr"/>
           <a:lstStyle/>
           <a:p>
-            <a:pPr algn="l" indent="0" marL="0">
+            <a:pPr eaLnBrk="0" algn="l" indent="0" marL="0">
               <a:buNone/>
             </a:pPr>
             <a:r>
@@ -4435,7 +4435,7 @@
           <a:bodyPr wrap="square" lIns="0" tIns="0" rIns="0" bIns="0" rtlCol="0" anchor="ctr"/>
           <a:lstStyle/>
           <a:p>
-            <a:pPr algn="ctr" indent="0" marL="0">
+            <a:pPr eaLnBrk="0" algn="ctr" indent="0" marL="0">
               <a:buNone/>
             </a:pPr>
             <a:r>
@@ -4474,7 +4474,7 @@
           <a:bodyPr wrap="square" lIns="0" tIns="0" rIns="0" bIns="0" rtlCol="0" anchor="ctr"/>
           <a:lstStyle/>
           <a:p>
-            <a:pPr algn="l" indent="0" marL="0">
+            <a:pPr eaLnBrk="0" algn="l" indent="0" marL="0">
               <a:buNone/>
             </a:pPr>
             <a:r>
@@ -4521,7 +4521,7 @@
           <a:bodyPr wrap="square" lIns="0" tIns="0" rIns="0" bIns="0" rtlCol="0" anchor="ctr"/>
           <a:lstStyle/>
           <a:p>
-            <a:pPr algn="ctr" indent="0" marL="0">
+            <a:pPr eaLnBrk="0" algn="ctr" indent="0" marL="0">
               <a:buNone/>
             </a:pPr>
             <a:r>
@@ -4560,7 +4560,7 @@
           <a:bodyPr wrap="square" lIns="0" tIns="0" rIns="0" bIns="0" rtlCol="0" anchor="ctr"/>
           <a:lstStyle/>
           <a:p>
-            <a:pPr algn="l" indent="0" marL="0">
+            <a:pPr eaLnBrk="0" algn="l" indent="0" marL="0">
               <a:buNone/>
             </a:pPr>
             <a:r>
@@ -4617,7 +4617,7 @@
             </a:lvl1pPr>
           </a:lstStyle>
           <a:p>
-            <a:pPr algn="r"/>
+            <a:pPr eaLnBrk="0" algn="r"/>
             <a:fld id="{F7021451-1387-4CA6-816F-3879F97B5CBC}" type="slidenum">
               <a:rPr b="0" lang="en-US"/>
               <a:t>11</a:t>
@@ -4674,7 +4674,7 @@
           <a:bodyPr wrap="square" lIns="0" tIns="0" rIns="0" bIns="0" rtlCol="0" anchor="ctr"/>
           <a:lstStyle/>
           <a:p>
-            <a:pPr algn="l" indent="0" marL="0">
+            <a:pPr eaLnBrk="0" algn="l" indent="0" marL="0">
               <a:buNone/>
             </a:pPr>
             <a:r>
@@ -4740,7 +4740,7 @@
           <a:bodyPr wrap="square" lIns="0" tIns="0" rIns="0" bIns="0" rtlCol="0" anchor="ctr"/>
           <a:lstStyle/>
           <a:p>
-            <a:pPr indent="0" marL="0">
+            <a:pPr eaLnBrk="0" indent="0" marL="0">
               <a:spcAft>
                 <a:spcPts val="600"/>
               </a:spcAft>
@@ -4790,7 +4790,7 @@
           <a:bodyPr wrap="square" lIns="177800" tIns="0" rIns="177800" bIns="0" rtlCol="0" anchor="ctr"/>
           <a:lstStyle/>
           <a:p>
-            <a:pPr algn="l" indent="0" marL="0">
+            <a:pPr eaLnBrk="0" algn="l" indent="0" marL="0">
               <a:buNone/>
             </a:pPr>
             <a:r>
@@ -4829,7 +4829,7 @@
           <a:bodyPr wrap="square" lIns="0" tIns="0" rIns="0" bIns="0" rtlCol="0" anchor="ctr"/>
           <a:lstStyle/>
           <a:p>
-            <a:pPr algn="l" indent="0" marL="0">
+            <a:pPr eaLnBrk="0" algn="l" indent="0" marL="0">
               <a:buNone/>
             </a:pPr>
             <a:r>
@@ -4868,7 +4868,7 @@
           <a:bodyPr wrap="square" lIns="0" tIns="0" rIns="0" bIns="0" rtlCol="0" anchor="ctr"/>
           <a:lstStyle/>
           <a:p>
-            <a:pPr algn="l" indent="0" marL="0">
+            <a:pPr eaLnBrk="0" algn="l" indent="0" marL="0">
               <a:buNone/>
             </a:pPr>
             <a:r>
@@ -4907,7 +4907,7 @@
           <a:bodyPr wrap="square" lIns="0" tIns="0" rIns="0" bIns="0" rtlCol="0" anchor="ctr"/>
           <a:lstStyle/>
           <a:p>
-            <a:pPr algn="l" indent="0" marL="0">
+            <a:pPr eaLnBrk="0" algn="l" indent="0" marL="0">
               <a:buNone/>
             </a:pPr>
             <a:r>
@@ -4946,7 +4946,7 @@
           <a:bodyPr wrap="square" lIns="0" tIns="0" rIns="0" bIns="0" rtlCol="0" anchor="ctr"/>
           <a:lstStyle/>
           <a:p>
-            <a:pPr algn="l" indent="0" marL="0">
+            <a:pPr eaLnBrk="0" algn="l" indent="0" marL="0">
               <a:buNone/>
             </a:pPr>
             <a:r>
@@ -4985,7 +4985,7 @@
           <a:bodyPr wrap="square" lIns="0" tIns="0" rIns="0" bIns="0" rtlCol="0" anchor="ctr"/>
           <a:lstStyle/>
           <a:p>
-            <a:pPr algn="l" indent="0" marL="0">
+            <a:pPr eaLnBrk="0" algn="l" indent="0" marL="0">
               <a:buNone/>
             </a:pPr>
             <a:r>
@@ -5024,7 +5024,7 @@
           <a:bodyPr wrap="square" lIns="0" tIns="0" rIns="0" bIns="0" rtlCol="0" anchor="ctr"/>
           <a:lstStyle/>
           <a:p>
-            <a:pPr algn="l" indent="0" marL="0">
+            <a:pPr eaLnBrk="0" algn="l" indent="0" marL="0">
               <a:buNone/>
             </a:pPr>
             <a:r>
@@ -5071,7 +5071,7 @@
           <a:bodyPr wrap="square" lIns="177800" tIns="0" rIns="177800" bIns="0" rtlCol="0" anchor="ctr"/>
           <a:lstStyle/>
           <a:p>
-            <a:pPr algn="l" indent="0" marL="0">
+            <a:pPr eaLnBrk="0" algn="l" indent="0" marL="0">
               <a:buNone/>
             </a:pPr>
             <a:r>
@@ -5110,7 +5110,7 @@
           <a:bodyPr wrap="square" lIns="0" tIns="0" rIns="0" bIns="0" rtlCol="0" anchor="ctr"/>
           <a:lstStyle/>
           <a:p>
-            <a:pPr algn="l" indent="0" marL="0">
+            <a:pPr eaLnBrk="0" algn="l" indent="0" marL="0">
               <a:buNone/>
             </a:pPr>
             <a:r>
@@ -5149,7 +5149,7 @@
           <a:bodyPr wrap="square" lIns="0" tIns="0" rIns="0" bIns="0" rtlCol="0" anchor="ctr"/>
           <a:lstStyle/>
           <a:p>
-            <a:pPr algn="l" indent="0" marL="0">
+            <a:pPr eaLnBrk="0" algn="l" indent="0" marL="0">
               <a:buNone/>
             </a:pPr>
             <a:r>
@@ -5188,7 +5188,7 @@
           <a:bodyPr wrap="square" lIns="0" tIns="0" rIns="0" bIns="0" rtlCol="0" anchor="ctr"/>
           <a:lstStyle/>
           <a:p>
-            <a:pPr algn="l" indent="0" marL="0">
+            <a:pPr eaLnBrk="0" algn="l" indent="0" marL="0">
               <a:buNone/>
             </a:pPr>
             <a:r>
@@ -5227,7 +5227,7 @@
           <a:bodyPr wrap="square" lIns="0" tIns="0" rIns="0" bIns="0" rtlCol="0" anchor="ctr"/>
           <a:lstStyle/>
           <a:p>
-            <a:pPr algn="l" indent="0" marL="0">
+            <a:pPr eaLnBrk="0" algn="l" indent="0" marL="0">
               <a:buNone/>
             </a:pPr>
             <a:r>
@@ -5266,7 +5266,7 @@
           <a:bodyPr wrap="square" lIns="0" tIns="0" rIns="0" bIns="0" rtlCol="0" anchor="ctr"/>
           <a:lstStyle/>
           <a:p>
-            <a:pPr algn="l" indent="0" marL="0">
+            <a:pPr eaLnBrk="0" algn="l" indent="0" marL="0">
               <a:buNone/>
             </a:pPr>
             <a:r>
@@ -5305,7 +5305,7 @@
           <a:bodyPr wrap="square" lIns="0" tIns="0" rIns="0" bIns="0" rtlCol="0" anchor="ctr"/>
           <a:lstStyle/>
           <a:p>
-            <a:pPr algn="l" indent="0" marL="0">
+            <a:pPr eaLnBrk="0" algn="l" indent="0" marL="0">
               <a:buNone/>
             </a:pPr>
             <a:r>
@@ -5362,7 +5362,7 @@
             </a:lvl1pPr>
           </a:lstStyle>
           <a:p>
-            <a:pPr algn="r"/>
+            <a:pPr eaLnBrk="0" algn="r"/>
             <a:fld id="{F7021451-1387-4CA6-816F-3879F97B5CBC}" type="slidenum">
               <a:rPr b="0" lang="en-US"/>
               <a:t>12</a:t>
@@ -5419,7 +5419,7 @@
           <a:bodyPr wrap="square" lIns="0" tIns="0" rIns="0" bIns="0" rtlCol="0" anchor="ctr"/>
           <a:lstStyle/>
           <a:p>
-            <a:pPr algn="l" indent="0" marL="0">
+            <a:pPr eaLnBrk="0" algn="l" indent="0" marL="0">
               <a:buNone/>
             </a:pPr>
             <a:r>
@@ -5485,7 +5485,7 @@
           <a:bodyPr wrap="square" lIns="0" tIns="0" rIns="0" bIns="0" rtlCol="0" anchor="ctr"/>
           <a:lstStyle/>
           <a:p>
-            <a:pPr indent="0" marL="0">
+            <a:pPr eaLnBrk="0" indent="0" marL="0">
               <a:spcAft>
                 <a:spcPts val="600"/>
               </a:spcAft>
@@ -5535,7 +5535,7 @@
           <a:bodyPr wrap="square" lIns="0" tIns="0" rIns="0" bIns="0" rtlCol="0" anchor="ctr"/>
           <a:lstStyle/>
           <a:p>
-            <a:pPr algn="ctr" indent="0" marL="0">
+            <a:pPr eaLnBrk="0" algn="ctr" indent="0" marL="0">
               <a:buNone/>
             </a:pPr>
             <a:r>
@@ -6614,7 +6614,7 @@
           <a:bodyPr wrap="square" lIns="0" tIns="0" rIns="0" bIns="0" rtlCol="0" anchor="ctr"/>
           <a:lstStyle/>
           <a:p>
-            <a:pPr algn="ctr" indent="0" marL="0">
+            <a:pPr eaLnBrk="0" algn="ctr" indent="0" marL="0">
               <a:buNone/>
             </a:pPr>
             <a:r>
@@ -7486,7 +7486,7 @@
           <a:bodyPr wrap="square" lIns="0" tIns="0" rIns="0" bIns="0" rtlCol="0" anchor="ctr"/>
           <a:lstStyle/>
           <a:p>
-            <a:pPr algn="ctr" indent="0" marL="0">
+            <a:pPr eaLnBrk="0" algn="ctr" indent="0" marL="0">
               <a:buNone/>
             </a:pPr>
             <a:r>
@@ -8393,7 +8393,7 @@
             </a:lvl1pPr>
           </a:lstStyle>
           <a:p>
-            <a:pPr algn="r"/>
+            <a:pPr eaLnBrk="0" algn="r"/>
             <a:fld id="{F7021451-1387-4CA6-816F-3879F97B5CBC}" type="slidenum">
               <a:rPr b="0" lang="en-US"/>
               <a:t>13</a:t>
@@ -8450,7 +8450,7 @@
           <a:bodyPr wrap="square" lIns="0" tIns="0" rIns="0" bIns="0" rtlCol="0" anchor="ctr"/>
           <a:lstStyle/>
           <a:p>
-            <a:pPr algn="l" indent="0" marL="0">
+            <a:pPr eaLnBrk="0" algn="l" indent="0" marL="0">
               <a:buNone/>
             </a:pPr>
             <a:r>
@@ -8516,7 +8516,7 @@
           <a:bodyPr wrap="square" lIns="0" tIns="0" rIns="0" bIns="0" rtlCol="0" anchor="ctr"/>
           <a:lstStyle/>
           <a:p>
-            <a:pPr indent="0" marL="0">
+            <a:pPr eaLnBrk="0" indent="0" marL="0">
               <a:spcAft>
                 <a:spcPts val="600"/>
               </a:spcAft>
@@ -8566,7 +8566,7 @@
           <a:bodyPr wrap="square" lIns="177800" tIns="0" rIns="177800" bIns="0" rtlCol="0" anchor="ctr"/>
           <a:lstStyle/>
           <a:p>
-            <a:pPr algn="l" indent="0" marL="0">
+            <a:pPr eaLnBrk="0" algn="l" indent="0" marL="0">
               <a:buNone/>
             </a:pPr>
             <a:r>
@@ -8613,7 +8613,7 @@
           <a:bodyPr wrap="square" lIns="177800" tIns="0" rIns="177800" bIns="0" rtlCol="0" anchor="ctr"/>
           <a:lstStyle/>
           <a:p>
-            <a:pPr algn="l" indent="0" marL="0">
+            <a:pPr eaLnBrk="0" algn="l" indent="0" marL="0">
               <a:buNone/>
             </a:pPr>
             <a:r>
@@ -8652,7 +8652,7 @@
           <a:bodyPr wrap="square" lIns="0" tIns="0" rIns="0" bIns="0" rtlCol="0" anchor="t"/>
           <a:lstStyle/>
           <a:p>
-            <a:pPr algn="l" indent="0" marL="0">
+            <a:pPr eaLnBrk="0" algn="l" indent="0" marL="0">
               <a:buNone/>
             </a:pPr>
             <a:r>
@@ -8691,7 +8691,7 @@
           <a:bodyPr wrap="square" lIns="0" tIns="0" rIns="0" bIns="0" rtlCol="0" anchor="ctr"/>
           <a:lstStyle/>
           <a:p>
-            <a:pPr algn="l" indent="0" marL="0">
+            <a:pPr eaLnBrk="0" algn="l" indent="0" marL="0">
               <a:buNone/>
             </a:pPr>
             <a:r>
@@ -8708,7 +8708,7 @@
             <a:endParaRPr lang="ko-KR" sz="2600" dirty="0"/>
           </a:p>
           <a:p>
-            <a:pPr algn="l" indent="0" marL="0">
+            <a:pPr eaLnBrk="0" algn="l" indent="0" marL="0">
               <a:buNone/>
             </a:pPr>
             <a:r>
@@ -8747,7 +8747,7 @@
           <a:bodyPr wrap="square" lIns="0" tIns="0" rIns="0" bIns="0" rtlCol="0" anchor="ctr"/>
           <a:lstStyle/>
           <a:p>
-            <a:pPr algn="l" indent="0" marL="0">
+            <a:pPr eaLnBrk="0" algn="l" indent="0" marL="0">
               <a:buNone/>
             </a:pPr>
             <a:r>
@@ -8786,7 +8786,7 @@
           <a:bodyPr wrap="square" lIns="0" tIns="0" rIns="0" bIns="0" rtlCol="0" anchor="ctr"/>
           <a:lstStyle/>
           <a:p>
-            <a:pPr algn="l" indent="0" marL="0">
+            <a:pPr eaLnBrk="0" algn="l" indent="0" marL="0">
               <a:buNone/>
             </a:pPr>
             <a:r>
@@ -8825,7 +8825,7 @@
           <a:bodyPr wrap="square" lIns="0" tIns="0" rIns="0" bIns="0" rtlCol="0" anchor="ctr"/>
           <a:lstStyle/>
           <a:p>
-            <a:pPr algn="l" indent="0" marL="0">
+            <a:pPr eaLnBrk="0" algn="l" indent="0" marL="0">
               <a:buNone/>
             </a:pPr>
             <a:r>
@@ -8882,7 +8882,7 @@
             </a:lvl1pPr>
           </a:lstStyle>
           <a:p>
-            <a:pPr algn="r"/>
+            <a:pPr eaLnBrk="0" algn="r"/>
             <a:fld id="{F7021451-1387-4CA6-816F-3879F97B5CBC}" type="slidenum">
               <a:rPr b="0" lang="en-US"/>
               <a:t>14</a:t>
@@ -8939,7 +8939,7 @@
           <a:bodyPr wrap="square" lIns="0" tIns="0" rIns="0" bIns="0" rtlCol="0" anchor="ctr"/>
           <a:lstStyle/>
           <a:p>
-            <a:pPr algn="l" indent="0" marL="0">
+            <a:pPr eaLnBrk="0" algn="l" indent="0" marL="0">
               <a:buNone/>
             </a:pPr>
             <a:r>
@@ -8978,7 +8978,7 @@
           <a:bodyPr wrap="square" lIns="0" tIns="0" rIns="0" bIns="0" rtlCol="0" anchor="ctr"/>
           <a:lstStyle/>
           <a:p>
-            <a:pPr algn="l" indent="0" marL="0">
+            <a:pPr eaLnBrk="0" algn="l" indent="0" marL="0">
               <a:buNone/>
             </a:pPr>
             <a:r>
@@ -9044,7 +9044,7 @@
           <a:bodyPr wrap="square" lIns="0" tIns="0" rIns="0" bIns="0" rtlCol="0" anchor="ctr"/>
           <a:lstStyle/>
           <a:p>
-            <a:pPr indent="0" marL="0">
+            <a:pPr eaLnBrk="0" indent="0" marL="0">
               <a:spcAft>
                 <a:spcPts val="600"/>
               </a:spcAft>
@@ -9113,7 +9113,7 @@
           <a:bodyPr wrap="square" lIns="0" tIns="0" rIns="0" bIns="0" rtlCol="0" anchor="ctr"/>
           <a:lstStyle/>
           <a:p>
-            <a:pPr indent="0" marL="0">
+            <a:pPr eaLnBrk="0" indent="0" marL="0">
               <a:spcAft>
                 <a:spcPts val="600"/>
               </a:spcAft>
@@ -9182,7 +9182,7 @@
           <a:bodyPr wrap="square" lIns="0" tIns="0" rIns="0" bIns="0" rtlCol="0" anchor="ctr"/>
           <a:lstStyle/>
           <a:p>
-            <a:pPr indent="0" marL="0">
+            <a:pPr eaLnBrk="0" indent="0" marL="0">
               <a:spcAft>
                 <a:spcPts val="600"/>
               </a:spcAft>
@@ -9705,7 +9705,7 @@
       </p:sp>
       <p:sp>
         <p:nvSpPr>
-          <p:cNvPr id="30" name="S15-figure626" descr="십 칸 틀에 10개"/>
+          <p:cNvPr id="30" name="S15-figure626" descr="1개의 십 칸 틀 중 1번째: 모두 10개"/>
           <p:cNvSpPr/>
           <p:nvPr/>
         </p:nvSpPr>
@@ -9769,7 +9769,7 @@
             </a:lvl1pPr>
           </a:lstStyle>
           <a:p>
-            <a:pPr algn="r"/>
+            <a:pPr eaLnBrk="0" algn="r"/>
             <a:fld id="{F7021451-1387-4CA6-816F-3879F97B5CBC}" type="slidenum">
               <a:rPr b="0" lang="en-US"/>
               <a:t>15</a:t>
@@ -9826,7 +9826,7 @@
           <a:bodyPr wrap="square" lIns="0" tIns="0" rIns="0" bIns="0" rtlCol="0" anchor="ctr"/>
           <a:lstStyle/>
           <a:p>
-            <a:pPr algn="l" indent="0" marL="0">
+            <a:pPr eaLnBrk="0" algn="l" indent="0" marL="0">
               <a:buNone/>
             </a:pPr>
             <a:r>
@@ -9873,7 +9873,7 @@
           <a:bodyPr wrap="square" lIns="0" tIns="0" rIns="0" bIns="0" rtlCol="0" anchor="ctr"/>
           <a:lstStyle/>
           <a:p>
-            <a:pPr algn="ctr" indent="0" marL="0">
+            <a:pPr eaLnBrk="0" algn="ctr" indent="0" marL="0">
               <a:buNone/>
             </a:pPr>
             <a:r>
@@ -10393,7 +10393,7 @@
       </p:sp>
       <p:sp>
         <p:nvSpPr>
-          <p:cNvPr id="24" name="S02-figure48" descr="십 칸 틀에 10개"/>
+          <p:cNvPr id="24" name="S02-figure48" descr="1개의 십 칸 틀 중 1번째: 모두 10개"/>
           <p:cNvSpPr/>
           <p:nvPr/>
         </p:nvSpPr>
@@ -10447,7 +10447,7 @@
           <a:bodyPr wrap="square" lIns="0" tIns="0" rIns="0" bIns="0" rtlCol="0" anchor="ctr"/>
           <a:lstStyle/>
           <a:p>
-            <a:pPr algn="ctr" indent="0" marL="0">
+            <a:pPr eaLnBrk="0" algn="ctr" indent="0" marL="0">
               <a:buNone/>
             </a:pPr>
             <a:r>
@@ -10486,7 +10486,7 @@
           <a:bodyPr wrap="square" lIns="0" tIns="0" rIns="0" bIns="0" rtlCol="0" anchor="ctr"/>
           <a:lstStyle/>
           <a:p>
-            <a:pPr algn="l" indent="0" marL="0">
+            <a:pPr eaLnBrk="0" algn="l" indent="0" marL="0">
               <a:buNone/>
             </a:pPr>
             <a:r>
@@ -10533,7 +10533,7 @@
           <a:bodyPr wrap="square" lIns="0" tIns="0" rIns="0" bIns="0" rtlCol="0" anchor="ctr"/>
           <a:lstStyle/>
           <a:p>
-            <a:pPr algn="ctr" indent="0" marL="0">
+            <a:pPr eaLnBrk="0" algn="ctr" indent="0" marL="0">
               <a:buNone/>
             </a:pPr>
             <a:r>
@@ -10572,7 +10572,7 @@
           <a:bodyPr wrap="square" lIns="0" tIns="0" rIns="0" bIns="0" rtlCol="0" anchor="ctr"/>
           <a:lstStyle/>
           <a:p>
-            <a:pPr algn="l" indent="0" marL="0">
+            <a:pPr eaLnBrk="0" algn="l" indent="0" marL="0">
               <a:buNone/>
             </a:pPr>
             <a:r>
@@ -10629,7 +10629,7 @@
             </a:lvl1pPr>
           </a:lstStyle>
           <a:p>
-            <a:pPr algn="r"/>
+            <a:pPr eaLnBrk="0" algn="r"/>
             <a:fld id="{F7021451-1387-4CA6-816F-3879F97B5CBC}" type="slidenum">
               <a:rPr b="0" lang="en-US"/>
               <a:t>2</a:t>
@@ -10686,7 +10686,7 @@
           <a:bodyPr wrap="square" lIns="0" tIns="0" rIns="0" bIns="0" rtlCol="0" anchor="ctr"/>
           <a:lstStyle/>
           <a:p>
-            <a:pPr algn="l" indent="0" marL="0">
+            <a:pPr eaLnBrk="0" algn="l" indent="0" marL="0">
               <a:buNone/>
             </a:pPr>
             <a:r>
@@ -10752,7 +10752,7 @@
           <a:bodyPr wrap="square" lIns="0" tIns="0" rIns="0" bIns="0" rtlCol="0" anchor="ctr"/>
           <a:lstStyle/>
           <a:p>
-            <a:pPr indent="0" marL="0">
+            <a:pPr eaLnBrk="0" indent="0" marL="0">
               <a:spcAft>
                 <a:spcPts val="600"/>
               </a:spcAft>
@@ -10772,7 +10772,7 @@
             <a:endParaRPr lang="ko-KR" sz="3200" dirty="0"/>
           </a:p>
           <a:p>
-            <a:pPr indent="0" marL="0">
+            <a:pPr eaLnBrk="0" indent="0" marL="0">
               <a:spcAft>
                 <a:spcPts val="600"/>
               </a:spcAft>
@@ -11295,7 +11295,7 @@
       </p:sp>
       <p:sp>
         <p:nvSpPr>
-          <p:cNvPr id="25" name="S03-figure75" descr="십 칸 틀에 10개"/>
+          <p:cNvPr id="25" name="S03-figure75" descr="1개의 십 칸 틀 중 1번째: 모두 10개"/>
           <p:cNvSpPr/>
           <p:nvPr/>
         </p:nvSpPr>
@@ -11341,7 +11341,7 @@
           <a:bodyPr wrap="square" lIns="0" tIns="0" rIns="0" bIns="0" rtlCol="0" anchor="ctr"/>
           <a:lstStyle/>
           <a:p>
-            <a:pPr algn="ctr" indent="0" marL="0">
+            <a:pPr eaLnBrk="0" algn="ctr" indent="0" marL="0">
               <a:buNone/>
             </a:pPr>
             <a:r>
@@ -11686,7 +11686,7 @@
       </p:sp>
       <p:sp>
         <p:nvSpPr>
-          <p:cNvPr id="40" name="S03-figure90" descr="십 칸 틀에 3개"/>
+          <p:cNvPr id="40" name="S03-figure90" descr="1개의 십 칸 틀 중 1번째: 모두 3개"/>
           <p:cNvSpPr/>
           <p:nvPr/>
         </p:nvSpPr>
@@ -11732,7 +11732,7 @@
           <a:bodyPr wrap="square" lIns="0" tIns="0" rIns="0" bIns="0" rtlCol="0" anchor="ctr"/>
           <a:lstStyle/>
           <a:p>
-            <a:pPr algn="ctr" indent="0" marL="0">
+            <a:pPr eaLnBrk="0" algn="ctr" indent="0" marL="0">
               <a:buNone/>
             </a:pPr>
             <a:r>
@@ -11789,7 +11789,7 @@
             </a:lvl1pPr>
           </a:lstStyle>
           <a:p>
-            <a:pPr algn="r"/>
+            <a:pPr eaLnBrk="0" algn="r"/>
             <a:fld id="{F7021451-1387-4CA6-816F-3879F97B5CBC}" type="slidenum">
               <a:rPr b="0" lang="en-US"/>
               <a:t>3</a:t>
@@ -11846,7 +11846,7 @@
           <a:bodyPr wrap="square" lIns="0" tIns="0" rIns="0" bIns="0" rtlCol="0" anchor="ctr"/>
           <a:lstStyle/>
           <a:p>
-            <a:pPr algn="l" indent="0" marL="0">
+            <a:pPr eaLnBrk="0" algn="l" indent="0" marL="0">
               <a:buNone/>
             </a:pPr>
             <a:r>
@@ -11912,7 +11912,7 @@
           <a:bodyPr wrap="square" lIns="0" tIns="0" rIns="0" bIns="0" rtlCol="0" anchor="ctr"/>
           <a:lstStyle/>
           <a:p>
-            <a:pPr indent="0" marL="0">
+            <a:pPr eaLnBrk="0" indent="0" marL="0">
               <a:spcAft>
                 <a:spcPts val="600"/>
               </a:spcAft>
@@ -11966,7 +11966,7 @@
                     <a:bodyPr/>
                     <a:lstStyle/>
                     <a:p>
-                      <a:pPr algn="ctr" indent="0" marL="0">
+                      <a:pPr eaLnBrk="0" algn="ctr" indent="0" marL="0">
                         <a:buNone/>
                       </a:pPr>
                       <a:r>
@@ -12034,7 +12034,7 @@
                     <a:bodyPr/>
                     <a:lstStyle/>
                     <a:p>
-                      <a:pPr algn="ctr" indent="0" marL="0">
+                      <a:pPr eaLnBrk="0" algn="ctr" indent="0" marL="0">
                         <a:buNone/>
                       </a:pPr>
                       <a:r>
@@ -12102,7 +12102,7 @@
                     <a:bodyPr/>
                     <a:lstStyle/>
                     <a:p>
-                      <a:pPr algn="ctr" indent="0" marL="0">
+                      <a:pPr eaLnBrk="0" algn="ctr" indent="0" marL="0">
                         <a:buNone/>
                       </a:pPr>
                       <a:r>
@@ -12172,7 +12172,7 @@
                     <a:bodyPr/>
                     <a:lstStyle/>
                     <a:p>
-                      <a:pPr algn="ctr" indent="0" marL="0">
+                      <a:pPr eaLnBrk="0" algn="ctr" indent="0" marL="0">
                         <a:buNone/>
                       </a:pPr>
                       <a:r>
@@ -12240,7 +12240,7 @@
                     <a:bodyPr/>
                     <a:lstStyle/>
                     <a:p>
-                      <a:pPr algn="ctr" indent="0" marL="0">
+                      <a:pPr eaLnBrk="0" algn="ctr" indent="0" marL="0">
                         <a:buNone/>
                       </a:pPr>
                       <a:r>
@@ -12308,7 +12308,7 @@
                     <a:bodyPr/>
                     <a:lstStyle/>
                     <a:p>
-                      <a:pPr algn="ctr" indent="0" marL="0">
+                      <a:pPr eaLnBrk="0" algn="ctr" indent="0" marL="0">
                         <a:buNone/>
                       </a:pPr>
                       <a:r>
@@ -12378,7 +12378,7 @@
                     <a:bodyPr/>
                     <a:lstStyle/>
                     <a:p>
-                      <a:pPr algn="ctr" indent="0" marL="0">
+                      <a:pPr eaLnBrk="0" algn="ctr" indent="0" marL="0">
                         <a:buNone/>
                       </a:pPr>
                       <a:r>
@@ -12446,7 +12446,7 @@
                     <a:bodyPr/>
                     <a:lstStyle/>
                     <a:p>
-                      <a:pPr algn="ctr" indent="0" marL="0">
+                      <a:pPr eaLnBrk="0" algn="ctr" indent="0" marL="0">
                         <a:buNone/>
                       </a:pPr>
                       <a:r>
@@ -12514,7 +12514,7 @@
                     <a:bodyPr/>
                     <a:lstStyle/>
                     <a:p>
-                      <a:pPr algn="ctr" indent="0" marL="0">
+                      <a:pPr eaLnBrk="0" algn="ctr" indent="0" marL="0">
                         <a:buNone/>
                       </a:pPr>
                       <a:r>
@@ -12584,7 +12584,7 @@
                     <a:bodyPr/>
                     <a:lstStyle/>
                     <a:p>
-                      <a:pPr algn="ctr" indent="0" marL="0">
+                      <a:pPr eaLnBrk="0" algn="ctr" indent="0" marL="0">
                         <a:buNone/>
                       </a:pPr>
                       <a:r>
@@ -12652,7 +12652,7 @@
                     <a:bodyPr/>
                     <a:lstStyle/>
                     <a:p>
-                      <a:pPr algn="ctr" indent="0" marL="0">
+                      <a:pPr eaLnBrk="0" algn="ctr" indent="0" marL="0">
                         <a:buNone/>
                       </a:pPr>
                       <a:r>
@@ -12720,7 +12720,7 @@
                     <a:bodyPr/>
                     <a:lstStyle/>
                     <a:p>
-                      <a:pPr algn="ctr" indent="0" marL="0">
+                      <a:pPr eaLnBrk="0" algn="ctr" indent="0" marL="0">
                         <a:buNone/>
                       </a:pPr>
                       <a:r>
@@ -12790,7 +12790,7 @@
                     <a:bodyPr/>
                     <a:lstStyle/>
                     <a:p>
-                      <a:pPr algn="ctr" indent="0" marL="0">
+                      <a:pPr eaLnBrk="0" algn="ctr" indent="0" marL="0">
                         <a:buNone/>
                       </a:pPr>
                       <a:r>
@@ -12858,7 +12858,7 @@
                     <a:bodyPr/>
                     <a:lstStyle/>
                     <a:p>
-                      <a:pPr algn="ctr" indent="0" marL="0">
+                      <a:pPr eaLnBrk="0" algn="ctr" indent="0" marL="0">
                         <a:buNone/>
                       </a:pPr>
                       <a:r>
@@ -12926,7 +12926,7 @@
                     <a:bodyPr/>
                     <a:lstStyle/>
                     <a:p>
-                      <a:pPr algn="ctr" indent="0" marL="0">
+                      <a:pPr eaLnBrk="0" algn="ctr" indent="0" marL="0">
                         <a:buNone/>
                       </a:pPr>
                       <a:r>
@@ -12996,7 +12996,7 @@
                     <a:bodyPr/>
                     <a:lstStyle/>
                     <a:p>
-                      <a:pPr algn="ctr" indent="0" marL="0">
+                      <a:pPr eaLnBrk="0" algn="ctr" indent="0" marL="0">
                         <a:buNone/>
                       </a:pPr>
                       <a:r>
@@ -13064,7 +13064,7 @@
                     <a:bodyPr/>
                     <a:lstStyle/>
                     <a:p>
-                      <a:pPr algn="ctr" indent="0" marL="0">
+                      <a:pPr eaLnBrk="0" algn="ctr" indent="0" marL="0">
                         <a:buNone/>
                       </a:pPr>
                       <a:r>
@@ -13132,7 +13132,7 @@
                     <a:bodyPr/>
                     <a:lstStyle/>
                     <a:p>
-                      <a:pPr algn="ctr" indent="0" marL="0">
+                      <a:pPr eaLnBrk="0" algn="ctr" indent="0" marL="0">
                         <a:buNone/>
                       </a:pPr>
                       <a:r>
@@ -13233,7 +13233,7 @@
                     <a:bodyPr/>
                     <a:lstStyle/>
                     <a:p>
-                      <a:pPr algn="ctr" indent="0" marL="0">
+                      <a:pPr eaLnBrk="0" algn="ctr" indent="0" marL="0">
                         <a:buNone/>
                       </a:pPr>
                       <a:r>
@@ -13301,7 +13301,7 @@
                     <a:bodyPr/>
                     <a:lstStyle/>
                     <a:p>
-                      <a:pPr algn="ctr" indent="0" marL="0">
+                      <a:pPr eaLnBrk="0" algn="ctr" indent="0" marL="0">
                         <a:buNone/>
                       </a:pPr>
                       <a:r>
@@ -13369,7 +13369,7 @@
                     <a:bodyPr/>
                     <a:lstStyle/>
                     <a:p>
-                      <a:pPr algn="ctr" indent="0" marL="0">
+                      <a:pPr eaLnBrk="0" algn="ctr" indent="0" marL="0">
                         <a:buNone/>
                       </a:pPr>
                       <a:r>
@@ -13439,7 +13439,7 @@
                     <a:bodyPr/>
                     <a:lstStyle/>
                     <a:p>
-                      <a:pPr algn="ctr" indent="0" marL="0">
+                      <a:pPr eaLnBrk="0" algn="ctr" indent="0" marL="0">
                         <a:buNone/>
                       </a:pPr>
                       <a:r>
@@ -13507,7 +13507,7 @@
                     <a:bodyPr/>
                     <a:lstStyle/>
                     <a:p>
-                      <a:pPr algn="ctr" indent="0" marL="0">
+                      <a:pPr eaLnBrk="0" algn="ctr" indent="0" marL="0">
                         <a:buNone/>
                       </a:pPr>
                       <a:r>
@@ -13575,7 +13575,7 @@
                     <a:bodyPr/>
                     <a:lstStyle/>
                     <a:p>
-                      <a:pPr algn="ctr" indent="0" marL="0">
+                      <a:pPr eaLnBrk="0" algn="ctr" indent="0" marL="0">
                         <a:buNone/>
                       </a:pPr>
                       <a:r>
@@ -13645,7 +13645,7 @@
                     <a:bodyPr/>
                     <a:lstStyle/>
                     <a:p>
-                      <a:pPr algn="ctr" indent="0" marL="0">
+                      <a:pPr eaLnBrk="0" algn="ctr" indent="0" marL="0">
                         <a:buNone/>
                       </a:pPr>
                       <a:r>
@@ -13713,7 +13713,7 @@
                     <a:bodyPr/>
                     <a:lstStyle/>
                     <a:p>
-                      <a:pPr algn="ctr" indent="0" marL="0">
+                      <a:pPr eaLnBrk="0" algn="ctr" indent="0" marL="0">
                         <a:buNone/>
                       </a:pPr>
                       <a:r>
@@ -13781,7 +13781,7 @@
                     <a:bodyPr/>
                     <a:lstStyle/>
                     <a:p>
-                      <a:pPr algn="ctr" indent="0" marL="0">
+                      <a:pPr eaLnBrk="0" algn="ctr" indent="0" marL="0">
                         <a:buNone/>
                       </a:pPr>
                       <a:r>
@@ -13851,7 +13851,7 @@
                     <a:bodyPr/>
                     <a:lstStyle/>
                     <a:p>
-                      <a:pPr algn="ctr" indent="0" marL="0">
+                      <a:pPr eaLnBrk="0" algn="ctr" indent="0" marL="0">
                         <a:buNone/>
                       </a:pPr>
                       <a:r>
@@ -13919,7 +13919,7 @@
                     <a:bodyPr/>
                     <a:lstStyle/>
                     <a:p>
-                      <a:pPr algn="ctr" indent="0" marL="0">
+                      <a:pPr eaLnBrk="0" algn="ctr" indent="0" marL="0">
                         <a:buNone/>
                       </a:pPr>
                       <a:r>
@@ -13987,7 +13987,7 @@
                     <a:bodyPr/>
                     <a:lstStyle/>
                     <a:p>
-                      <a:pPr algn="ctr" indent="0" marL="0">
+                      <a:pPr eaLnBrk="0" algn="ctr" indent="0" marL="0">
                         <a:buNone/>
                       </a:pPr>
                       <a:r>
@@ -14057,7 +14057,7 @@
                     <a:bodyPr/>
                     <a:lstStyle/>
                     <a:p>
-                      <a:pPr algn="ctr" indent="0" marL="0">
+                      <a:pPr eaLnBrk="0" algn="ctr" indent="0" marL="0">
                         <a:buNone/>
                       </a:pPr>
                       <a:r>
@@ -14125,7 +14125,7 @@
                     <a:bodyPr/>
                     <a:lstStyle/>
                     <a:p>
-                      <a:pPr algn="ctr" indent="0" marL="0">
+                      <a:pPr eaLnBrk="0" algn="ctr" indent="0" marL="0">
                         <a:buNone/>
                       </a:pPr>
                       <a:r>
@@ -14193,7 +14193,7 @@
                     <a:bodyPr/>
                     <a:lstStyle/>
                     <a:p>
-                      <a:pPr algn="ctr" indent="0" marL="0">
+                      <a:pPr eaLnBrk="0" algn="ctr" indent="0" marL="0">
                         <a:buNone/>
                       </a:pPr>
                       <a:r>
@@ -14300,7 +14300,7 @@
             </a:lvl1pPr>
           </a:lstStyle>
           <a:p>
-            <a:pPr algn="r"/>
+            <a:pPr eaLnBrk="0" algn="r"/>
             <a:fld id="{F7021451-1387-4CA6-816F-3879F97B5CBC}" type="slidenum">
               <a:rPr b="0" lang="en-US"/>
               <a:t>4</a:t>
@@ -14357,7 +14357,7 @@
           <a:bodyPr wrap="square" lIns="0" tIns="0" rIns="0" bIns="0" rtlCol="0" anchor="ctr"/>
           <a:lstStyle/>
           <a:p>
-            <a:pPr algn="l" indent="0" marL="0">
+            <a:pPr eaLnBrk="0" algn="l" indent="0" marL="0">
               <a:buNone/>
             </a:pPr>
             <a:r>
@@ -14396,7 +14396,7 @@
           <a:bodyPr wrap="square" lIns="0" tIns="0" rIns="0" bIns="0" rtlCol="0" anchor="ctr"/>
           <a:lstStyle/>
           <a:p>
-            <a:pPr algn="l" indent="0" marL="0">
+            <a:pPr eaLnBrk="0" algn="l" indent="0" marL="0">
               <a:buNone/>
             </a:pPr>
             <a:r>
@@ -14462,7 +14462,7 @@
           <a:bodyPr wrap="square" lIns="0" tIns="0" rIns="0" bIns="0" rtlCol="0" anchor="ctr"/>
           <a:lstStyle/>
           <a:p>
-            <a:pPr indent="0" marL="0">
+            <a:pPr eaLnBrk="0" indent="0" marL="0">
               <a:spcAft>
                 <a:spcPts val="600"/>
               </a:spcAft>
@@ -14997,7 +14997,7 @@
           <a:bodyPr wrap="square" lIns="0" tIns="0" rIns="0" bIns="0" rtlCol="0" anchor="ctr"/>
           <a:lstStyle/>
           <a:p>
-            <a:pPr algn="ctr" indent="0" marL="0">
+            <a:pPr eaLnBrk="0" algn="ctr" indent="0" marL="0">
               <a:buNone/>
             </a:pPr>
             <a:r>
@@ -15761,7 +15761,7 @@
           <a:bodyPr wrap="square" lIns="0" tIns="0" rIns="0" bIns="0" rtlCol="0" anchor="ctr"/>
           <a:lstStyle/>
           <a:p>
-            <a:pPr algn="ctr" indent="0" marL="0">
+            <a:pPr eaLnBrk="0" algn="ctr" indent="0" marL="0">
               <a:buNone/>
             </a:pPr>
             <a:r>
@@ -16757,7 +16757,7 @@
           <a:bodyPr wrap="square" lIns="0" tIns="0" rIns="0" bIns="0" rtlCol="0" anchor="ctr"/>
           <a:lstStyle/>
           <a:p>
-            <a:pPr algn="ctr" indent="0" marL="0">
+            <a:pPr eaLnBrk="0" algn="ctr" indent="0" marL="0">
               <a:buNone/>
             </a:pPr>
             <a:r>
@@ -17985,7 +17985,7 @@
           <a:bodyPr wrap="square" lIns="0" tIns="0" rIns="0" bIns="0" rtlCol="0" anchor="ctr"/>
           <a:lstStyle/>
           <a:p>
-            <a:pPr algn="ctr" indent="0" marL="0">
+            <a:pPr eaLnBrk="0" algn="ctr" indent="0" marL="0">
               <a:buNone/>
             </a:pPr>
             <a:r>
@@ -18042,7 +18042,7 @@
             </a:lvl1pPr>
           </a:lstStyle>
           <a:p>
-            <a:pPr algn="r"/>
+            <a:pPr eaLnBrk="0" algn="r"/>
             <a:fld id="{F7021451-1387-4CA6-816F-3879F97B5CBC}" type="slidenum">
               <a:rPr b="0" lang="en-US"/>
               <a:t>5</a:t>
@@ -18099,7 +18099,7 @@
           <a:bodyPr wrap="square" lIns="0" tIns="0" rIns="0" bIns="0" rtlCol="0" anchor="ctr"/>
           <a:lstStyle/>
           <a:p>
-            <a:pPr algn="l" indent="0" marL="0">
+            <a:pPr eaLnBrk="0" algn="l" indent="0" marL="0">
               <a:buNone/>
             </a:pPr>
             <a:r>
@@ -18138,7 +18138,7 @@
           <a:bodyPr wrap="square" lIns="0" tIns="0" rIns="0" bIns="0" rtlCol="0" anchor="ctr"/>
           <a:lstStyle/>
           <a:p>
-            <a:pPr algn="l" indent="0" marL="0">
+            <a:pPr eaLnBrk="0" algn="l" indent="0" marL="0">
               <a:buNone/>
             </a:pPr>
             <a:r>
@@ -18204,7 +18204,7 @@
           <a:bodyPr wrap="square" lIns="0" tIns="0" rIns="0" bIns="0" rtlCol="0" anchor="ctr"/>
           <a:lstStyle/>
           <a:p>
-            <a:pPr indent="0" marL="0">
+            <a:pPr eaLnBrk="0" indent="0" marL="0">
               <a:spcAft>
                 <a:spcPts val="600"/>
               </a:spcAft>
@@ -18224,7 +18224,7 @@
             <a:endParaRPr lang="ko-KR" sz="3200" dirty="0"/>
           </a:p>
           <a:p>
-            <a:pPr indent="0" marL="0">
+            <a:pPr eaLnBrk="0" indent="0" marL="0">
               <a:spcAft>
                 <a:spcPts val="600"/>
               </a:spcAft>
@@ -18853,7 +18853,7 @@
           <a:bodyPr wrap="square" lIns="0" tIns="0" rIns="0" bIns="0" rtlCol="0" anchor="ctr"/>
           <a:lstStyle/>
           <a:p>
-            <a:pPr algn="ctr" indent="0" marL="0">
+            <a:pPr eaLnBrk="0" algn="ctr" indent="0" marL="0">
               <a:buNone/>
             </a:pPr>
             <a:r>
@@ -18996,7 +18996,7 @@
           <a:bodyPr wrap="square" lIns="0" tIns="0" rIns="0" bIns="0" rtlCol="0" anchor="ctr"/>
           <a:lstStyle/>
           <a:p>
-            <a:pPr algn="ctr" indent="0" marL="0">
+            <a:pPr eaLnBrk="0" algn="ctr" indent="0" marL="0">
               <a:buNone/>
             </a:pPr>
             <a:r>
@@ -19053,7 +19053,7 @@
             </a:lvl1pPr>
           </a:lstStyle>
           <a:p>
-            <a:pPr algn="r"/>
+            <a:pPr eaLnBrk="0" algn="r"/>
             <a:fld id="{F7021451-1387-4CA6-816F-3879F97B5CBC}" type="slidenum">
               <a:rPr b="0" lang="en-US"/>
               <a:t>6</a:t>
@@ -19110,7 +19110,7 @@
           <a:bodyPr wrap="square" lIns="0" tIns="0" rIns="0" bIns="0" rtlCol="0" anchor="ctr"/>
           <a:lstStyle/>
           <a:p>
-            <a:pPr algn="l" indent="0" marL="0">
+            <a:pPr eaLnBrk="0" algn="l" indent="0" marL="0">
               <a:buNone/>
             </a:pPr>
             <a:r>
@@ -19176,7 +19176,7 @@
           <a:bodyPr wrap="square" lIns="0" tIns="0" rIns="0" bIns="0" rtlCol="0" anchor="ctr"/>
           <a:lstStyle/>
           <a:p>
-            <a:pPr indent="0" marL="0">
+            <a:pPr eaLnBrk="0" indent="0" marL="0">
               <a:spcAft>
                 <a:spcPts val="600"/>
               </a:spcAft>
@@ -19196,7 +19196,7 @@
             <a:endParaRPr lang="ko-KR" sz="3200" dirty="0"/>
           </a:p>
           <a:p>
-            <a:pPr indent="0" marL="0">
+            <a:pPr eaLnBrk="0" indent="0" marL="0">
               <a:spcAft>
                 <a:spcPts val="600"/>
               </a:spcAft>
@@ -20074,7 +20074,7 @@
                     <a:bodyPr/>
                     <a:lstStyle/>
                     <a:p>
-                      <a:pPr algn="ctr" indent="0" marL="0">
+                      <a:pPr eaLnBrk="0" algn="ctr" indent="0" marL="0">
                         <a:buNone/>
                       </a:pPr>
                       <a:r>
@@ -20142,7 +20142,7 @@
                     <a:bodyPr/>
                     <a:lstStyle/>
                     <a:p>
-                      <a:pPr algn="ctr" indent="0" marL="0">
+                      <a:pPr eaLnBrk="0" algn="ctr" indent="0" marL="0">
                         <a:buNone/>
                       </a:pPr>
                       <a:r>
@@ -20212,7 +20212,7 @@
                     <a:bodyPr/>
                     <a:lstStyle/>
                     <a:p>
-                      <a:pPr algn="ctr" indent="0" marL="0">
+                      <a:pPr eaLnBrk="0" algn="ctr" indent="0" marL="0">
                         <a:buNone/>
                       </a:pPr>
                       <a:r>
@@ -20280,7 +20280,7 @@
                     <a:bodyPr/>
                     <a:lstStyle/>
                     <a:p>
-                      <a:pPr algn="ctr" indent="0" marL="0">
+                      <a:pPr eaLnBrk="0" algn="ctr" indent="0" marL="0">
                         <a:buNone/>
                       </a:pPr>
                       <a:r>
@@ -20387,7 +20387,7 @@
             </a:lvl1pPr>
           </a:lstStyle>
           <a:p>
-            <a:pPr algn="r"/>
+            <a:pPr eaLnBrk="0" algn="r"/>
             <a:fld id="{F7021451-1387-4CA6-816F-3879F97B5CBC}" type="slidenum">
               <a:rPr b="0" lang="en-US"/>
               <a:t>7</a:t>
@@ -20444,7 +20444,7 @@
           <a:bodyPr wrap="square" lIns="0" tIns="0" rIns="0" bIns="0" rtlCol="0" anchor="ctr"/>
           <a:lstStyle/>
           <a:p>
-            <a:pPr algn="l" indent="0" marL="0">
+            <a:pPr eaLnBrk="0" algn="l" indent="0" marL="0">
               <a:buNone/>
             </a:pPr>
             <a:r>
@@ -20483,7 +20483,7 @@
           <a:bodyPr wrap="square" lIns="0" tIns="0" rIns="0" bIns="0" rtlCol="0" anchor="ctr"/>
           <a:lstStyle/>
           <a:p>
-            <a:pPr algn="l" indent="0" marL="0">
+            <a:pPr eaLnBrk="0" algn="l" indent="0" marL="0">
               <a:buNone/>
             </a:pPr>
             <a:r>
@@ -20549,7 +20549,7 @@
           <a:bodyPr wrap="square" lIns="0" tIns="0" rIns="0" bIns="0" rtlCol="0" anchor="ctr"/>
           <a:lstStyle/>
           <a:p>
-            <a:pPr indent="0" marL="0">
+            <a:pPr eaLnBrk="0" indent="0" marL="0">
               <a:spcAft>
                 <a:spcPts val="600"/>
               </a:spcAft>
@@ -20599,7 +20599,7 @@
           <a:bodyPr wrap="square" lIns="0" tIns="0" rIns="0" bIns="0" rtlCol="0" anchor="ctr"/>
           <a:lstStyle/>
           <a:p>
-            <a:pPr algn="ctr" indent="0" marL="0">
+            <a:pPr eaLnBrk="0" algn="ctr" indent="0" marL="0">
               <a:buNone/>
             </a:pPr>
             <a:r>
@@ -21119,7 +21119,7 @@
       </p:sp>
       <p:sp>
         <p:nvSpPr>
-          <p:cNvPr id="27" name="S08-figure341" descr="꽉 찬 십 칸 틀(10개)"/>
+          <p:cNvPr id="27" name="S08-figure341" descr="1개의 십 칸 틀 중 1번째: 모두 10개"/>
           <p:cNvSpPr/>
           <p:nvPr/>
         </p:nvSpPr>
@@ -21521,7 +21521,7 @@
       </p:sp>
       <p:sp>
         <p:nvSpPr>
-          <p:cNvPr id="43" name="S08-figure357" descr="십 칸 틀에 5개"/>
+          <p:cNvPr id="43" name="S08-figure357" descr="1개의 십 칸 틀 중 1번째: 모두 5개"/>
           <p:cNvSpPr/>
           <p:nvPr/>
         </p:nvSpPr>
@@ -21575,7 +21575,7 @@
           <a:bodyPr wrap="square" lIns="0" tIns="0" rIns="0" bIns="0" rtlCol="0" anchor="ctr"/>
           <a:lstStyle/>
           <a:p>
-            <a:pPr algn="ctr" indent="0" marL="0">
+            <a:pPr eaLnBrk="0" algn="ctr" indent="0" marL="0">
               <a:buNone/>
             </a:pPr>
             <a:r>
@@ -22265,7 +22265,7 @@
           <a:bodyPr wrap="square" lIns="0" tIns="0" rIns="0" bIns="0" rtlCol="0" anchor="ctr"/>
           <a:lstStyle/>
           <a:p>
-            <a:pPr algn="ctr" indent="0" marL="0">
+            <a:pPr eaLnBrk="0" algn="ctr" indent="0" marL="0">
               <a:buNone/>
             </a:pPr>
             <a:r>
@@ -23304,7 +23304,7 @@
             </a:lvl1pPr>
           </a:lstStyle>
           <a:p>
-            <a:pPr algn="r"/>
+            <a:pPr eaLnBrk="0" algn="r"/>
             <a:fld id="{F7021451-1387-4CA6-816F-3879F97B5CBC}" type="slidenum">
               <a:rPr b="0" lang="en-US"/>
               <a:t>8</a:t>
@@ -23361,7 +23361,7 @@
           <a:bodyPr wrap="square" lIns="0" tIns="0" rIns="0" bIns="0" rtlCol="0" anchor="ctr"/>
           <a:lstStyle/>
           <a:p>
-            <a:pPr algn="l" indent="0" marL="0">
+            <a:pPr eaLnBrk="0" algn="l" indent="0" marL="0">
               <a:buNone/>
             </a:pPr>
             <a:r>
@@ -23427,7 +23427,7 @@
           <a:bodyPr wrap="square" lIns="0" tIns="0" rIns="0" bIns="0" rtlCol="0" anchor="ctr"/>
           <a:lstStyle/>
           <a:p>
-            <a:pPr indent="0" marL="0">
+            <a:pPr eaLnBrk="0" indent="0" marL="0">
               <a:spcAft>
                 <a:spcPts val="600"/>
               </a:spcAft>
@@ -23477,7 +23477,7 @@
           <a:bodyPr wrap="square" lIns="0" tIns="0" rIns="0" bIns="0" rtlCol="0" anchor="ctr"/>
           <a:lstStyle/>
           <a:p>
-            <a:pPr algn="ctr" indent="0" marL="0">
+            <a:pPr eaLnBrk="0" algn="ctr" indent="0" marL="0">
               <a:buNone/>
             </a:pPr>
             <a:r>
@@ -23516,7 +23516,7 @@
           <a:bodyPr wrap="square" lIns="0" tIns="0" rIns="0" bIns="0" rtlCol="0" anchor="ctr"/>
           <a:lstStyle/>
           <a:p>
-            <a:pPr algn="l" indent="0" marL="0">
+            <a:pPr eaLnBrk="0" algn="l" indent="0" marL="0">
               <a:buNone/>
             </a:pPr>
             <a:r>
@@ -23563,7 +23563,7 @@
           <a:bodyPr wrap="square" lIns="0" tIns="0" rIns="0" bIns="0" rtlCol="0" anchor="ctr"/>
           <a:lstStyle/>
           <a:p>
-            <a:pPr algn="ctr" indent="0" marL="0">
+            <a:pPr eaLnBrk="0" algn="ctr" indent="0" marL="0">
               <a:buNone/>
             </a:pPr>
             <a:r>
@@ -23602,7 +23602,7 @@
           <a:bodyPr wrap="square" lIns="0" tIns="0" rIns="0" bIns="0" rtlCol="0" anchor="ctr"/>
           <a:lstStyle/>
           <a:p>
-            <a:pPr algn="l" indent="0" marL="0">
+            <a:pPr eaLnBrk="0" algn="l" indent="0" marL="0">
               <a:buNone/>
             </a:pPr>
             <a:r>
@@ -23649,7 +23649,7 @@
           <a:bodyPr wrap="square" lIns="0" tIns="0" rIns="0" bIns="0" rtlCol="0" anchor="ctr"/>
           <a:lstStyle/>
           <a:p>
-            <a:pPr algn="ctr" indent="0" marL="0">
+            <a:pPr eaLnBrk="0" algn="ctr" indent="0" marL="0">
               <a:buNone/>
             </a:pPr>
             <a:r>
@@ -23688,7 +23688,7 @@
           <a:bodyPr wrap="square" lIns="0" tIns="0" rIns="0" bIns="0" rtlCol="0" anchor="ctr"/>
           <a:lstStyle/>
           <a:p>
-            <a:pPr algn="l" indent="0" marL="0">
+            <a:pPr eaLnBrk="0" algn="l" indent="0" marL="0">
               <a:buNone/>
             </a:pPr>
             <a:r>
@@ -23735,7 +23735,7 @@
           <a:bodyPr wrap="square" lIns="0" tIns="0" rIns="0" bIns="0" rtlCol="0" anchor="ctr"/>
           <a:lstStyle/>
           <a:p>
-            <a:pPr algn="ctr" indent="0" marL="0">
+            <a:pPr eaLnBrk="0" algn="ctr" indent="0" marL="0">
               <a:buNone/>
             </a:pPr>
             <a:r>
@@ -23774,7 +23774,7 @@
           <a:bodyPr wrap="square" lIns="0" tIns="0" rIns="0" bIns="0" rtlCol="0" anchor="ctr"/>
           <a:lstStyle/>
           <a:p>
-            <a:pPr algn="l" indent="0" marL="0">
+            <a:pPr eaLnBrk="0" algn="l" indent="0" marL="0">
               <a:buNone/>
             </a:pPr>
             <a:r>
@@ -23831,7 +23831,7 @@
             </a:lvl1pPr>
           </a:lstStyle>
           <a:p>
-            <a:pPr algn="r"/>
+            <a:pPr eaLnBrk="0" algn="r"/>
             <a:fld id="{F7021451-1387-4CA6-816F-3879F97B5CBC}" type="slidenum">
               <a:rPr b="0" lang="en-US"/>
               <a:t>9</a:t>

--- a/dist/초1/수학/수와연산/초1_수학_수와연산_06_50까지의수.pptx
+++ b/dist/초1/수학/수와연산/초1_수학_수와연산_06_50까지의수.pptx
@@ -121,13 +121,13 @@
   <p:extLst>
     <p:ext uri="{521415D9-36F7-43E2-AB2F-B90AF26B5E84}">
       <p14:sectionLst xmlns:p14="http://schemas.microsoft.com/office/powerpoint/2010/main">
-        <p14:section name="도입" id="{8b76500e-133b-b0ff-a9a7-33cdd046dc83}">
+        <p14:section name="도입" id="{7d2b6bfe-c025-a2ad-823e-6a92b5abe1b3}">
           <p14:sldIdLst>
             <p14:sldId id="256"/>
             <p14:sldId id="257"/>
           </p14:sldIdLst>
         </p14:section>
-        <p14:section name="개념" id="{f2109447-4294-3dbf-6d00-bea2489765f0}">
+        <p14:section name="개념" id="{301b966d-a207-0414-7040-aa39fdbc243b}">
           <p14:sldIdLst>
             <p14:sldId id="258"/>
             <p14:sldId id="259"/>
@@ -136,26 +136,26 @@
             <p14:sldId id="262"/>
           </p14:sldIdLst>
         </p14:section>
-        <p14:section name="연습" id="{b6ae6bcb-1b44-0594-bf24-566e7078ec50}">
+        <p14:section name="연습" id="{62386188-7bda-cd56-e86b-48e6c33aebfd}">
           <p14:sldIdLst>
             <p14:sldId id="263"/>
             <p14:sldId id="264"/>
             <p14:sldId id="265"/>
           </p14:sldIdLst>
         </p14:section>
-        <p14:section name="확인" id="{c9795f98-6076-3829-f08c-c6cbc79db283}">
+        <p14:section name="확인" id="{57c07785-d766-d9d5-5ddd-a060b7a51329}">
           <p14:sldIdLst>
             <p14:sldId id="266"/>
             <p14:sldId id="267"/>
             <p14:sldId id="268"/>
           </p14:sldIdLst>
         </p14:section>
-        <p14:section name="정리" id="{80e20c6a-33f6-6c11-bb0b-75bbd56e8e59}">
+        <p14:section name="정리" id="{eca3e57c-5e68-6b17-2b88-03059c616afd}">
           <p14:sldIdLst>
             <p14:sldId id="269"/>
           </p14:sldIdLst>
         </p14:section>
-        <p14:section name="보충" id="{db1bb1d7-c9b7-5f8f-8859-59e1ea07defa}">
+        <p14:section name="보충" id="{852b69f0-715b-98f9-6c7f-e58092f68a75}">
           <p14:sldIdLst>
             <p14:sldId id="270"/>
           </p14:sldIdLst>
@@ -9852,7 +9852,7 @@
         </p:nvSpPr>
         <p:spPr>
           <a:xfrm>
-            <a:off x="548640" y="1773936"/>
+            <a:off x="548640" y="1796796"/>
             <a:ext cx="566928" cy="566928"/>
           </a:xfrm>
           <a:prstGeom prst="roundRect">
@@ -9899,8 +9899,8 @@
         </p:nvSpPr>
         <p:spPr>
           <a:xfrm>
-            <a:off x="1618488" y="1325880"/>
-            <a:ext cx="731520" cy="731520"/>
+            <a:off x="2201418" y="1325880"/>
+            <a:ext cx="754380" cy="754380"/>
           </a:xfrm>
           <a:prstGeom prst="rect">
             <a:avLst/>
@@ -9924,8 +9924,8 @@
         </p:nvSpPr>
         <p:spPr>
           <a:xfrm>
-            <a:off x="1742846" y="1450238"/>
-            <a:ext cx="482803" cy="482803"/>
+            <a:off x="2329663" y="1454125"/>
+            <a:ext cx="497891" cy="497891"/>
           </a:xfrm>
           <a:prstGeom prst="ellipse">
             <a:avLst/>
@@ -9949,8 +9949,8 @@
         </p:nvSpPr>
         <p:spPr>
           <a:xfrm>
-            <a:off x="2350008" y="1325880"/>
-            <a:ext cx="731520" cy="731520"/>
+            <a:off x="2955798" y="1325880"/>
+            <a:ext cx="754380" cy="754380"/>
           </a:xfrm>
           <a:prstGeom prst="rect">
             <a:avLst/>
@@ -9974,8 +9974,8 @@
         </p:nvSpPr>
         <p:spPr>
           <a:xfrm>
-            <a:off x="2474366" y="1450238"/>
-            <a:ext cx="482803" cy="482803"/>
+            <a:off x="3084043" y="1454125"/>
+            <a:ext cx="497891" cy="497891"/>
           </a:xfrm>
           <a:prstGeom prst="ellipse">
             <a:avLst/>
@@ -9999,8 +9999,8 @@
         </p:nvSpPr>
         <p:spPr>
           <a:xfrm>
-            <a:off x="3081528" y="1325880"/>
-            <a:ext cx="731520" cy="731520"/>
+            <a:off x="3710178" y="1325880"/>
+            <a:ext cx="754380" cy="754380"/>
           </a:xfrm>
           <a:prstGeom prst="rect">
             <a:avLst/>
@@ -10024,8 +10024,8 @@
         </p:nvSpPr>
         <p:spPr>
           <a:xfrm>
-            <a:off x="3205886" y="1450238"/>
-            <a:ext cx="482803" cy="482803"/>
+            <a:off x="3838423" y="1454125"/>
+            <a:ext cx="497891" cy="497891"/>
           </a:xfrm>
           <a:prstGeom prst="ellipse">
             <a:avLst/>
@@ -10049,8 +10049,8 @@
         </p:nvSpPr>
         <p:spPr>
           <a:xfrm>
-            <a:off x="3813048" y="1325880"/>
-            <a:ext cx="731520" cy="731520"/>
+            <a:off x="4464558" y="1325880"/>
+            <a:ext cx="754380" cy="754380"/>
           </a:xfrm>
           <a:prstGeom prst="rect">
             <a:avLst/>
@@ -10074,8 +10074,8 @@
         </p:nvSpPr>
         <p:spPr>
           <a:xfrm>
-            <a:off x="3937406" y="1450238"/>
-            <a:ext cx="482803" cy="482803"/>
+            <a:off x="4592803" y="1454125"/>
+            <a:ext cx="497891" cy="497891"/>
           </a:xfrm>
           <a:prstGeom prst="ellipse">
             <a:avLst/>
@@ -10099,8 +10099,8 @@
         </p:nvSpPr>
         <p:spPr>
           <a:xfrm>
-            <a:off x="4544568" y="1325880"/>
-            <a:ext cx="731520" cy="731520"/>
+            <a:off x="5218938" y="1325880"/>
+            <a:ext cx="754380" cy="754380"/>
           </a:xfrm>
           <a:prstGeom prst="rect">
             <a:avLst/>
@@ -10124,8 +10124,8 @@
         </p:nvSpPr>
         <p:spPr>
           <a:xfrm>
-            <a:off x="4668926" y="1450238"/>
-            <a:ext cx="482803" cy="482803"/>
+            <a:off x="5347183" y="1454125"/>
+            <a:ext cx="497891" cy="497891"/>
           </a:xfrm>
           <a:prstGeom prst="ellipse">
             <a:avLst/>
@@ -10149,8 +10149,8 @@
         </p:nvSpPr>
         <p:spPr>
           <a:xfrm>
-            <a:off x="1618488" y="2057400"/>
-            <a:ext cx="731520" cy="731520"/>
+            <a:off x="2201418" y="2080260"/>
+            <a:ext cx="754380" cy="754380"/>
           </a:xfrm>
           <a:prstGeom prst="rect">
             <a:avLst/>
@@ -10174,8 +10174,8 @@
         </p:nvSpPr>
         <p:spPr>
           <a:xfrm>
-            <a:off x="1742846" y="2181758"/>
-            <a:ext cx="482803" cy="482803"/>
+            <a:off x="2329663" y="2208505"/>
+            <a:ext cx="497891" cy="497891"/>
           </a:xfrm>
           <a:prstGeom prst="ellipse">
             <a:avLst/>
@@ -10199,8 +10199,8 @@
         </p:nvSpPr>
         <p:spPr>
           <a:xfrm>
-            <a:off x="2350008" y="2057400"/>
-            <a:ext cx="731520" cy="731520"/>
+            <a:off x="2955798" y="2080260"/>
+            <a:ext cx="754380" cy="754380"/>
           </a:xfrm>
           <a:prstGeom prst="rect">
             <a:avLst/>
@@ -10224,8 +10224,8 @@
         </p:nvSpPr>
         <p:spPr>
           <a:xfrm>
-            <a:off x="2474366" y="2181758"/>
-            <a:ext cx="482803" cy="482803"/>
+            <a:off x="3084043" y="2208505"/>
+            <a:ext cx="497891" cy="497891"/>
           </a:xfrm>
           <a:prstGeom prst="ellipse">
             <a:avLst/>
@@ -10249,8 +10249,8 @@
         </p:nvSpPr>
         <p:spPr>
           <a:xfrm>
-            <a:off x="3081528" y="2057400"/>
-            <a:ext cx="731520" cy="731520"/>
+            <a:off x="3710178" y="2080260"/>
+            <a:ext cx="754380" cy="754380"/>
           </a:xfrm>
           <a:prstGeom prst="rect">
             <a:avLst/>
@@ -10274,8 +10274,8 @@
         </p:nvSpPr>
         <p:spPr>
           <a:xfrm>
-            <a:off x="3205886" y="2181758"/>
-            <a:ext cx="482803" cy="482803"/>
+            <a:off x="3838423" y="2208505"/>
+            <a:ext cx="497891" cy="497891"/>
           </a:xfrm>
           <a:prstGeom prst="ellipse">
             <a:avLst/>
@@ -10299,8 +10299,8 @@
         </p:nvSpPr>
         <p:spPr>
           <a:xfrm>
-            <a:off x="3813048" y="2057400"/>
-            <a:ext cx="731520" cy="731520"/>
+            <a:off x="4464558" y="2080260"/>
+            <a:ext cx="754380" cy="754380"/>
           </a:xfrm>
           <a:prstGeom prst="rect">
             <a:avLst/>
@@ -10324,8 +10324,8 @@
         </p:nvSpPr>
         <p:spPr>
           <a:xfrm>
-            <a:off x="3937406" y="2181758"/>
-            <a:ext cx="482803" cy="482803"/>
+            <a:off x="4592803" y="2208505"/>
+            <a:ext cx="497891" cy="497891"/>
           </a:xfrm>
           <a:prstGeom prst="ellipse">
             <a:avLst/>
@@ -10349,8 +10349,8 @@
         </p:nvSpPr>
         <p:spPr>
           <a:xfrm>
-            <a:off x="4544568" y="2057400"/>
-            <a:ext cx="731520" cy="731520"/>
+            <a:off x="5218938" y="2080260"/>
+            <a:ext cx="754380" cy="754380"/>
           </a:xfrm>
           <a:prstGeom prst="rect">
             <a:avLst/>
@@ -10374,8 +10374,8 @@
         </p:nvSpPr>
         <p:spPr>
           <a:xfrm>
-            <a:off x="4668926" y="2181758"/>
-            <a:ext cx="482803" cy="482803"/>
+            <a:off x="5347183" y="2208505"/>
+            <a:ext cx="497891" cy="497891"/>
           </a:xfrm>
           <a:prstGeom prst="ellipse">
             <a:avLst/>
@@ -10399,8 +10399,8 @@
         </p:nvSpPr>
         <p:spPr>
           <a:xfrm>
-            <a:off x="1618488" y="1325880"/>
-            <a:ext cx="3657600" cy="1463040"/>
+            <a:off x="2201418" y="1325880"/>
+            <a:ext cx="3771900" cy="1508760"/>
           </a:xfrm>
           <a:prstGeom prst="rect">
             <a:avLst/>

--- a/dist/초1/수학/수와연산/초1_수학_수와연산_06_50까지의수.pptx
+++ b/dist/초1/수학/수와연산/초1_수학_수와연산_06_50까지의수.pptx
@@ -121,13 +121,13 @@
   <p:extLst>
     <p:ext uri="{521415D9-36F7-43E2-AB2F-B90AF26B5E84}">
       <p14:sectionLst xmlns:p14="http://schemas.microsoft.com/office/powerpoint/2010/main">
-        <p14:section name="도입" id="{7d2b6bfe-c025-a2ad-823e-6a92b5abe1b3}">
+        <p14:section name="도입" id="{47f997e0-f7de-f7f6-11a6-724fbad709fc}">
           <p14:sldIdLst>
             <p14:sldId id="256"/>
             <p14:sldId id="257"/>
           </p14:sldIdLst>
         </p14:section>
-        <p14:section name="개념" id="{301b966d-a207-0414-7040-aa39fdbc243b}">
+        <p14:section name="개념" id="{0214ddc2-ee8c-8379-4433-68f07ccbe9da}">
           <p14:sldIdLst>
             <p14:sldId id="258"/>
             <p14:sldId id="259"/>
@@ -136,26 +136,26 @@
             <p14:sldId id="262"/>
           </p14:sldIdLst>
         </p14:section>
-        <p14:section name="연습" id="{62386188-7bda-cd56-e86b-48e6c33aebfd}">
+        <p14:section name="연습" id="{3e29f798-c9c9-ace5-3ee2-13ed87f1d959}">
           <p14:sldIdLst>
             <p14:sldId id="263"/>
             <p14:sldId id="264"/>
             <p14:sldId id="265"/>
           </p14:sldIdLst>
         </p14:section>
-        <p14:section name="확인" id="{57c07785-d766-d9d5-5ddd-a060b7a51329}">
+        <p14:section name="확인" id="{87330a72-b890-4138-493e-2044a5e334aa}">
           <p14:sldIdLst>
             <p14:sldId id="266"/>
             <p14:sldId id="267"/>
             <p14:sldId id="268"/>
           </p14:sldIdLst>
         </p14:section>
-        <p14:section name="정리" id="{eca3e57c-5e68-6b17-2b88-03059c616afd}">
+        <p14:section name="정리" id="{ce28d12d-e1e4-f083-916e-e86fa941897f}">
           <p14:sldIdLst>
             <p14:sldId id="269"/>
           </p14:sldIdLst>
         </p14:section>
-        <p14:section name="보충" id="{852b69f0-715b-98f9-6c7f-e58092f68a75}">
+        <p14:section name="보충" id="{d9cad139-d85e-14c4-6d2e-25c264b3092b}">
           <p14:sldIdLst>
             <p14:sldId id="270"/>
           </p14:sldIdLst>
@@ -11948,7 +11948,7 @@
           </p:nvPr>
         </p:nvGraphicFramePr>
         <p:xfrm>
-          <a:off x="772668" y="1638300"/>
+          <a:off x="772668" y="1687830"/>
           <a:ext cx="4937760" cy="914400"/>
         </p:xfrm>
         <a:graphic>
@@ -11960,7 +11960,7 @@
                 <a:gridCol w="1645920"/>
                 <a:gridCol w="1645920"/>
               </a:tblGrid>
-              <a:tr h="528320">
+              <a:tr h="511810">
                 <a:tc>
                   <a:txBody>
                     <a:bodyPr/>
@@ -12166,7 +12166,7 @@
                   </a:tcPr>
                 </a:tc>
               </a:tr>
-              <a:tr h="528320">
+              <a:tr h="511810">
                 <a:tc>
                   <a:txBody>
                     <a:bodyPr/>
@@ -12372,7 +12372,7 @@
                   </a:tcPr>
                 </a:tc>
               </a:tr>
-              <a:tr h="528320">
+              <a:tr h="511810">
                 <a:tc>
                   <a:txBody>
                     <a:bodyPr/>
@@ -12578,7 +12578,7 @@
                   </a:tcPr>
                 </a:tc>
               </a:tr>
-              <a:tr h="528320">
+              <a:tr h="511810">
                 <a:tc>
                   <a:txBody>
                     <a:bodyPr/>
@@ -12784,7 +12784,7 @@
                   </a:tcPr>
                 </a:tc>
               </a:tr>
-              <a:tr h="528320">
+              <a:tr h="511810">
                 <a:tc>
                   <a:txBody>
                     <a:bodyPr/>
@@ -12990,7 +12990,7 @@
                   </a:tcPr>
                 </a:tc>
               </a:tr>
-              <a:tr h="528320">
+              <a:tr h="511810">
                 <a:tc>
                   <a:txBody>
                     <a:bodyPr/>
@@ -13215,7 +13215,7 @@
           </p:nvPr>
         </p:nvGraphicFramePr>
         <p:xfrm>
-          <a:off x="6478524" y="1902460"/>
+          <a:off x="6478524" y="1943735"/>
           <a:ext cx="4937760" cy="914400"/>
         </p:xfrm>
         <a:graphic>
@@ -13227,7 +13227,7 @@
                 <a:gridCol w="1645920"/>
                 <a:gridCol w="1645920"/>
               </a:tblGrid>
-              <a:tr h="528320">
+              <a:tr h="511810">
                 <a:tc>
                   <a:txBody>
                     <a:bodyPr/>
@@ -13433,7 +13433,7 @@
                   </a:tcPr>
                 </a:tc>
               </a:tr>
-              <a:tr h="528320">
+              <a:tr h="511810">
                 <a:tc>
                   <a:txBody>
                     <a:bodyPr/>
@@ -13639,7 +13639,7 @@
                   </a:tcPr>
                 </a:tc>
               </a:tr>
-              <a:tr h="528320">
+              <a:tr h="511810">
                 <a:tc>
                   <a:txBody>
                     <a:bodyPr/>
@@ -13845,7 +13845,7 @@
                   </a:tcPr>
                 </a:tc>
               </a:tr>
-              <a:tr h="528320">
+              <a:tr h="511810">
                 <a:tc>
                   <a:txBody>
                     <a:bodyPr/>
@@ -14051,7 +14051,7 @@
                   </a:tcPr>
                 </a:tc>
               </a:tr>
-              <a:tr h="528320">
+              <a:tr h="511810">
                 <a:tc>
                   <a:txBody>
                     <a:bodyPr/>
@@ -20057,7 +20057,7 @@
           </p:nvPr>
         </p:nvGraphicFramePr>
         <p:xfrm>
-          <a:off x="6478524" y="2355342"/>
+          <a:off x="6478524" y="2375662"/>
           <a:ext cx="4937760" cy="914400"/>
         </p:xfrm>
         <a:graphic>
@@ -20068,7 +20068,7 @@
                 <a:gridCol w="2962656"/>
                 <a:gridCol w="1975104"/>
               </a:tblGrid>
-              <a:tr h="650240">
+              <a:tr h="629920">
                 <a:tc>
                   <a:txBody>
                     <a:bodyPr/>
@@ -20206,7 +20206,7 @@
                   </a:tcPr>
                 </a:tc>
               </a:tr>
-              <a:tr h="650240">
+              <a:tr h="629920">
                 <a:tc>
                   <a:txBody>
                     <a:bodyPr/>
